--- a/_misc/figure1_files/setup_with_person_on_photo/setup_slide_without_walkingpath.pptx
+++ b/_misc/figure1_files/setup_with_person_on_photo/setup_slide_without_walkingpath.pptx
@@ -261,7 +261,7 @@
           <a:p>
             <a:fld id="{61088BA3-3677-42F1-90B8-66FDAEF4E117}" type="datetimeFigureOut">
               <a:rPr lang="nl-BE" smtClean="0"/>
-              <a:t>23/07/2025</a:t>
+              <a:t>29/07/2025</a:t>
             </a:fld>
             <a:endParaRPr lang="nl-BE"/>
           </a:p>
@@ -461,7 +461,7 @@
           <a:p>
             <a:fld id="{61088BA3-3677-42F1-90B8-66FDAEF4E117}" type="datetimeFigureOut">
               <a:rPr lang="nl-BE" smtClean="0"/>
-              <a:t>23/07/2025</a:t>
+              <a:t>29/07/2025</a:t>
             </a:fld>
             <a:endParaRPr lang="nl-BE"/>
           </a:p>
@@ -671,7 +671,7 @@
           <a:p>
             <a:fld id="{61088BA3-3677-42F1-90B8-66FDAEF4E117}" type="datetimeFigureOut">
               <a:rPr lang="nl-BE" smtClean="0"/>
-              <a:t>23/07/2025</a:t>
+              <a:t>29/07/2025</a:t>
             </a:fld>
             <a:endParaRPr lang="nl-BE"/>
           </a:p>
@@ -871,7 +871,7 @@
           <a:p>
             <a:fld id="{61088BA3-3677-42F1-90B8-66FDAEF4E117}" type="datetimeFigureOut">
               <a:rPr lang="nl-BE" smtClean="0"/>
-              <a:t>23/07/2025</a:t>
+              <a:t>29/07/2025</a:t>
             </a:fld>
             <a:endParaRPr lang="nl-BE"/>
           </a:p>
@@ -1147,7 +1147,7 @@
           <a:p>
             <a:fld id="{61088BA3-3677-42F1-90B8-66FDAEF4E117}" type="datetimeFigureOut">
               <a:rPr lang="nl-BE" smtClean="0"/>
-              <a:t>23/07/2025</a:t>
+              <a:t>29/07/2025</a:t>
             </a:fld>
             <a:endParaRPr lang="nl-BE"/>
           </a:p>
@@ -1415,7 +1415,7 @@
           <a:p>
             <a:fld id="{61088BA3-3677-42F1-90B8-66FDAEF4E117}" type="datetimeFigureOut">
               <a:rPr lang="nl-BE" smtClean="0"/>
-              <a:t>23/07/2025</a:t>
+              <a:t>29/07/2025</a:t>
             </a:fld>
             <a:endParaRPr lang="nl-BE"/>
           </a:p>
@@ -1830,7 +1830,7 @@
           <a:p>
             <a:fld id="{61088BA3-3677-42F1-90B8-66FDAEF4E117}" type="datetimeFigureOut">
               <a:rPr lang="nl-BE" smtClean="0"/>
-              <a:t>23/07/2025</a:t>
+              <a:t>29/07/2025</a:t>
             </a:fld>
             <a:endParaRPr lang="nl-BE"/>
           </a:p>
@@ -1972,7 +1972,7 @@
           <a:p>
             <a:fld id="{61088BA3-3677-42F1-90B8-66FDAEF4E117}" type="datetimeFigureOut">
               <a:rPr lang="nl-BE" smtClean="0"/>
-              <a:t>23/07/2025</a:t>
+              <a:t>29/07/2025</a:t>
             </a:fld>
             <a:endParaRPr lang="nl-BE"/>
           </a:p>
@@ -2085,7 +2085,7 @@
           <a:p>
             <a:fld id="{61088BA3-3677-42F1-90B8-66FDAEF4E117}" type="datetimeFigureOut">
               <a:rPr lang="nl-BE" smtClean="0"/>
-              <a:t>23/07/2025</a:t>
+              <a:t>29/07/2025</a:t>
             </a:fld>
             <a:endParaRPr lang="nl-BE"/>
           </a:p>
@@ -2398,7 +2398,7 @@
           <a:p>
             <a:fld id="{61088BA3-3677-42F1-90B8-66FDAEF4E117}" type="datetimeFigureOut">
               <a:rPr lang="nl-BE" smtClean="0"/>
-              <a:t>23/07/2025</a:t>
+              <a:t>29/07/2025</a:t>
             </a:fld>
             <a:endParaRPr lang="nl-BE"/>
           </a:p>
@@ -2687,7 +2687,7 @@
           <a:p>
             <a:fld id="{61088BA3-3677-42F1-90B8-66FDAEF4E117}" type="datetimeFigureOut">
               <a:rPr lang="nl-BE" smtClean="0"/>
-              <a:t>23/07/2025</a:t>
+              <a:t>29/07/2025</a:t>
             </a:fld>
             <a:endParaRPr lang="nl-BE"/>
           </a:p>
@@ -2930,7 +2930,7 @@
           <a:p>
             <a:fld id="{61088BA3-3677-42F1-90B8-66FDAEF4E117}" type="datetimeFigureOut">
               <a:rPr lang="nl-BE" smtClean="0"/>
-              <a:t>23/07/2025</a:t>
+              <a:t>29/07/2025</a:t>
             </a:fld>
             <a:endParaRPr lang="nl-BE"/>
           </a:p>
@@ -3385,10 +3385,10 @@
       </p:pic>
       <p:pic>
         <p:nvPicPr>
-          <p:cNvPr id="4" name="Afbeelding 3" descr="Afbeelding met schoeisel, overdekt, plafond, statief&#10;&#10;Door AI gegenereerde inhoud is mogelijk onjuist.">
-            <a:extLst>
-              <a:ext uri="{FF2B5EF4-FFF2-40B4-BE49-F238E27FC236}">
-                <a16:creationId xmlns:a16="http://schemas.microsoft.com/office/drawing/2014/main" id="{868A104A-C5BB-1C26-654E-B46500184F43}"/>
+          <p:cNvPr id="3" name="Afbeelding 2" descr="Afbeelding met schoeisel, overdekt, plafond, statief&#10;&#10;Door AI gegenereerde inhoud is mogelijk onjuist.">
+            <a:extLst>
+              <a:ext uri="{FF2B5EF4-FFF2-40B4-BE49-F238E27FC236}">
+                <a16:creationId xmlns:a16="http://schemas.microsoft.com/office/drawing/2014/main" id="{BF363141-2860-9D61-805D-59D71E6C3425}"/>
               </a:ext>
             </a:extLst>
           </p:cNvPr>

--- a/_misc/figure1_files/setup_with_person_on_photo/setup_slide_without_walkingpath.pptx
+++ b/_misc/figure1_files/setup_with_person_on_photo/setup_slide_without_walkingpath.pptx
@@ -261,7 +261,7 @@
           <a:p>
             <a:fld id="{61088BA3-3677-42F1-90B8-66FDAEF4E117}" type="datetimeFigureOut">
               <a:rPr lang="nl-BE" smtClean="0"/>
-              <a:t>29/07/2025</a:t>
+              <a:t>30/07/2025</a:t>
             </a:fld>
             <a:endParaRPr lang="nl-BE"/>
           </a:p>
@@ -461,7 +461,7 @@
           <a:p>
             <a:fld id="{61088BA3-3677-42F1-90B8-66FDAEF4E117}" type="datetimeFigureOut">
               <a:rPr lang="nl-BE" smtClean="0"/>
-              <a:t>29/07/2025</a:t>
+              <a:t>30/07/2025</a:t>
             </a:fld>
             <a:endParaRPr lang="nl-BE"/>
           </a:p>
@@ -671,7 +671,7 @@
           <a:p>
             <a:fld id="{61088BA3-3677-42F1-90B8-66FDAEF4E117}" type="datetimeFigureOut">
               <a:rPr lang="nl-BE" smtClean="0"/>
-              <a:t>29/07/2025</a:t>
+              <a:t>30/07/2025</a:t>
             </a:fld>
             <a:endParaRPr lang="nl-BE"/>
           </a:p>
@@ -871,7 +871,7 @@
           <a:p>
             <a:fld id="{61088BA3-3677-42F1-90B8-66FDAEF4E117}" type="datetimeFigureOut">
               <a:rPr lang="nl-BE" smtClean="0"/>
-              <a:t>29/07/2025</a:t>
+              <a:t>30/07/2025</a:t>
             </a:fld>
             <a:endParaRPr lang="nl-BE"/>
           </a:p>
@@ -1147,7 +1147,7 @@
           <a:p>
             <a:fld id="{61088BA3-3677-42F1-90B8-66FDAEF4E117}" type="datetimeFigureOut">
               <a:rPr lang="nl-BE" smtClean="0"/>
-              <a:t>29/07/2025</a:t>
+              <a:t>30/07/2025</a:t>
             </a:fld>
             <a:endParaRPr lang="nl-BE"/>
           </a:p>
@@ -1415,7 +1415,7 @@
           <a:p>
             <a:fld id="{61088BA3-3677-42F1-90B8-66FDAEF4E117}" type="datetimeFigureOut">
               <a:rPr lang="nl-BE" smtClean="0"/>
-              <a:t>29/07/2025</a:t>
+              <a:t>30/07/2025</a:t>
             </a:fld>
             <a:endParaRPr lang="nl-BE"/>
           </a:p>
@@ -1830,7 +1830,7 @@
           <a:p>
             <a:fld id="{61088BA3-3677-42F1-90B8-66FDAEF4E117}" type="datetimeFigureOut">
               <a:rPr lang="nl-BE" smtClean="0"/>
-              <a:t>29/07/2025</a:t>
+              <a:t>30/07/2025</a:t>
             </a:fld>
             <a:endParaRPr lang="nl-BE"/>
           </a:p>
@@ -1972,7 +1972,7 @@
           <a:p>
             <a:fld id="{61088BA3-3677-42F1-90B8-66FDAEF4E117}" type="datetimeFigureOut">
               <a:rPr lang="nl-BE" smtClean="0"/>
-              <a:t>29/07/2025</a:t>
+              <a:t>30/07/2025</a:t>
             </a:fld>
             <a:endParaRPr lang="nl-BE"/>
           </a:p>
@@ -2085,7 +2085,7 @@
           <a:p>
             <a:fld id="{61088BA3-3677-42F1-90B8-66FDAEF4E117}" type="datetimeFigureOut">
               <a:rPr lang="nl-BE" smtClean="0"/>
-              <a:t>29/07/2025</a:t>
+              <a:t>30/07/2025</a:t>
             </a:fld>
             <a:endParaRPr lang="nl-BE"/>
           </a:p>
@@ -2398,7 +2398,7 @@
           <a:p>
             <a:fld id="{61088BA3-3677-42F1-90B8-66FDAEF4E117}" type="datetimeFigureOut">
               <a:rPr lang="nl-BE" smtClean="0"/>
-              <a:t>29/07/2025</a:t>
+              <a:t>30/07/2025</a:t>
             </a:fld>
             <a:endParaRPr lang="nl-BE"/>
           </a:p>
@@ -2687,7 +2687,7 @@
           <a:p>
             <a:fld id="{61088BA3-3677-42F1-90B8-66FDAEF4E117}" type="datetimeFigureOut">
               <a:rPr lang="nl-BE" smtClean="0"/>
-              <a:t>29/07/2025</a:t>
+              <a:t>30/07/2025</a:t>
             </a:fld>
             <a:endParaRPr lang="nl-BE"/>
           </a:p>
@@ -2930,7 +2930,7 @@
           <a:p>
             <a:fld id="{61088BA3-3677-42F1-90B8-66FDAEF4E117}" type="datetimeFigureOut">
               <a:rPr lang="nl-BE" smtClean="0"/>
-              <a:t>29/07/2025</a:t>
+              <a:t>30/07/2025</a:t>
             </a:fld>
             <a:endParaRPr lang="nl-BE"/>
           </a:p>
@@ -3349,10 +3349,10 @@
       </p:grpSpPr>
       <p:pic>
         <p:nvPicPr>
-          <p:cNvPr id="5" name="Afbeelding 4" descr="Afbeelding met tekst, diagram, schermopname, lijn&#10;&#10;Door AI gegenereerde inhoud is mogelijk onjuist.">
-            <a:extLst>
-              <a:ext uri="{FF2B5EF4-FFF2-40B4-BE49-F238E27FC236}">
-                <a16:creationId xmlns:a16="http://schemas.microsoft.com/office/drawing/2014/main" id="{F713D659-854E-8ED4-06C2-3808DB1AEE87}"/>
+          <p:cNvPr id="2" name="Afbeelding 1" descr="Afbeelding met tekst, diagram, schermopname, lijn&#10;&#10;Door AI gegenereerde inhoud is mogelijk onjuist.">
+            <a:extLst>
+              <a:ext uri="{FF2B5EF4-FFF2-40B4-BE49-F238E27FC236}">
+                <a16:creationId xmlns:a16="http://schemas.microsoft.com/office/drawing/2014/main" id="{63B6809F-D8BE-E83D-DDA8-5EBFA465D0D1}"/>
               </a:ext>
             </a:extLst>
           </p:cNvPr>
@@ -3375,7 +3375,7 @@
         </p:blipFill>
         <p:spPr>
           <a:xfrm>
-            <a:off x="5257800" y="354844"/>
+            <a:off x="5257800" y="354843"/>
             <a:ext cx="6934200" cy="3578942"/>
           </a:xfrm>
           <a:prstGeom prst="rect">
@@ -3385,10 +3385,10 @@
       </p:pic>
       <p:pic>
         <p:nvPicPr>
-          <p:cNvPr id="3" name="Afbeelding 2" descr="Afbeelding met schoeisel, overdekt, plafond, statief&#10;&#10;Door AI gegenereerde inhoud is mogelijk onjuist.">
-            <a:extLst>
-              <a:ext uri="{FF2B5EF4-FFF2-40B4-BE49-F238E27FC236}">
-                <a16:creationId xmlns:a16="http://schemas.microsoft.com/office/drawing/2014/main" id="{BF363141-2860-9D61-805D-59D71E6C3425}"/>
+          <p:cNvPr id="6" name="Afbeelding 5" descr="Afbeelding met schoeisel, overdekt, plafond, kleding&#10;&#10;Door AI gegenereerde inhoud is mogelijk onjuist.">
+            <a:extLst>
+              <a:ext uri="{FF2B5EF4-FFF2-40B4-BE49-F238E27FC236}">
+                <a16:creationId xmlns:a16="http://schemas.microsoft.com/office/drawing/2014/main" id="{5CDDFAF9-114D-8CAD-4C34-FE2582C39F53}"/>
               </a:ext>
             </a:extLst>
           </p:cNvPr>
@@ -3411,7 +3411,7 @@
         </p:blipFill>
         <p:spPr>
           <a:xfrm>
-            <a:off x="76198" y="211930"/>
+            <a:off x="104773" y="211930"/>
             <a:ext cx="5153027" cy="3864770"/>
           </a:xfrm>
           <a:prstGeom prst="rect">
